--- a/examples/pm1_simple_ppt_merge/simple_ppt_merge_guide.pptx
+++ b/examples/pm1_simple_ppt_merge/simple_ppt_merge_guide.pptx
@@ -588,81 +588,61 @@
               <a:t>NOTE_CONTENT_FORMAT: 1.0</a:t>
             </a:r>
           </a:p>
-          <a:p>
-            <a:endParaRPr/>
-          </a:p>
-          <a:p>
-            <a:r>
-              <a:rPr lang="en-US" altLang="ja-JP"/>
+          <a:p/>
+          <a:p>
+            <a:r>
               <a:t>===BLOCK===</a:t>
             </a:r>
           </a:p>
           <a:p>
             <a:r>
-              <a:rPr lang="en-US" altLang="ja-JP"/>
               <a:t>{{BLOCK:IMAGE}}</a:t>
             </a:r>
           </a:p>
-          <a:p>
-            <a:endParaRPr lang="en-US" altLang="ja-JP"/>
-          </a:p>
-          <a:p>
-            <a:r>
-              <a:rPr lang="en-US" altLang="ja-JP"/>
+          <a:p/>
+          <a:p>
+            <a:r>
               <a:t>export-image-mode: slide_with_rectpct</a:t>
             </a:r>
           </a:p>
           <a:p>
             <a:r>
-              <a:rPr lang="en-US" altLang="ja-JP"/>
               <a:t>export-image-target: exportrange</a:t>
             </a:r>
           </a:p>
           <a:p>
             <a:r>
-              <a:rPr lang="en-US" altLang="ja-JP"/>
               <a:t>export-image: extracted/figures/&lt;__BASEFILENAME__&gt;_slide&lt;__SLIDENUM__&gt;_fig.png</a:t>
             </a:r>
           </a:p>
-          <a:p>
-            <a:endParaRPr lang="en-US" altLang="ja-JP"/>
-          </a:p>
-          <a:p>
-            <a:r>
-              <a:rPr lang="en-US" altLang="ja-JP"/>
+          <a:p/>
+          <a:p>
+            <a:r>
               <a:t>===BLOCK===</a:t>
             </a:r>
           </a:p>
           <a:p>
             <a:r>
-              <a:rPr lang="en-US" altLang="ja-JP"/>
               <a:t>{{BLOCK:IMAGE}}</a:t>
             </a:r>
           </a:p>
-          <a:p>
-            <a:endParaRPr lang="en-US" altLang="ja-JP"/>
-          </a:p>
-          <a:p>
-            <a:r>
-              <a:rPr lang="en-US" altLang="ja-JP"/>
+          <a:p/>
+          <a:p>
+            <a:r>
               <a:t>export-image-mode: slide_with_rectpct</a:t>
             </a:r>
           </a:p>
           <a:p>
             <a:r>
-              <a:rPr lang="en-US" altLang="ja-JP"/>
               <a:t>export-image-target: keyvisual</a:t>
             </a:r>
           </a:p>
           <a:p>
             <a:r>
-              <a:rPr lang="en-US" altLang="ja-JP"/>
               <a:t>export-image: extracted/figures/&lt;__BASEFILENAME__&gt;_keyvisual.png</a:t>
             </a:r>
           </a:p>
-          <a:p>
-            <a:endParaRPr/>
-          </a:p>
+          <a:p/>
           <a:p>
             <a:r>
               <a:t>===BLOCK===</a:t>
@@ -673,38 +653,15 @@
               <a:t>{{BLOCK:MD:LONG}}</a:t>
             </a:r>
           </a:p>
-          <a:p>
-            <a:endParaRPr/>
-          </a:p>
-          <a:p>
-            <a:r>
-              <a:t>export-note: extracted/</a:t>
-            </a:r>
-            <a:r>
-              <a:rPr lang="en-US" altLang="ja-JP"/>
-              <a:t>&lt;__BASEFILENAME__&gt;</a:t>
-            </a:r>
-            <a:r>
-              <a:t>_slide</a:t>
-            </a:r>
-            <a:r>
-              <a:rPr lang="en-US" altLang="ja-JP"/>
-              <a:t>&lt;__SLIDENUM__&gt;</a:t>
-            </a:r>
-            <a:r>
-              <a:t>_md.md</a:t>
-            </a:r>
-          </a:p>
-          <a:p>
-            <a:r>
-              <a:t>{{#id:section:&lt;__BASEFILENAME__&gt;:slide</a:t>
-            </a:r>
-            <a:r>
-              <a:rPr lang="en-US"/>
-              <a:t>&lt;__SLIDENUM__&gt;</a:t>
-            </a:r>
-            <a:r>
-              <a:t>}}</a:t>
+          <a:p/>
+          <a:p>
+            <a:r>
+              <a:t>export-note: extracted/&lt;__BASEFILENAME__&gt;_slide&lt;__SLIDENUM__&gt;_md.md</a:t>
+            </a:r>
+          </a:p>
+          <a:p>
+            <a:r>
+              <a:t>{{#id:section:&lt;__BASEFILENAME__&gt;:slide&lt;__SLIDENUM__&gt;}}</a:t>
             </a:r>
           </a:p>
           <a:p>
@@ -712,109 +669,47 @@
               <a:t>## &lt;__TITLE__&gt;</a:t>
             </a:r>
           </a:p>
-          <a:p>
-            <a:endParaRPr/>
-          </a:p>
+          <a:p/>
           <a:p>
             <a:r>
               <a:t>単純マージは２つのpptxファイルを単に結合するだけの、最も単純な機能です。</a:t>
             </a:r>
           </a:p>
-          <a:p>
-            <a:endParaRPr/>
-          </a:p>
+          <a:p/>
           <a:p>
             <a:r>
               <a:t>結合指示書には関連キーワード欄の命令を使って結合対象ファイルを記載します。これについては後述します。</a:t>
             </a:r>
           </a:p>
-          <a:p>
-            <a:endParaRPr/>
-          </a:p>
+          <a:p/>
           <a:p>
             <a:r>
               <a:t>処理のイメージは下記の通りです。</a:t>
             </a:r>
           </a:p>
-          <a:p>
-            <a:endParaRPr/>
-          </a:p>
-          <a:p>
-            <a:r>
-              <a:t>```{=latex}</a:t>
-            </a:r>
-          </a:p>
-          <a:p>
-            <a:r>
-              <a:t>\begin{center}</a:t>
-            </a:r>
-          </a:p>
-          <a:p>
-            <a:r>
-              <a:t>```</a:t>
-            </a:r>
-          </a:p>
-          <a:p>
-            <a:endParaRPr/>
-          </a:p>
-          <a:p>
-            <a:r>
-              <a:t>![](figures/</a:t>
-            </a:r>
-            <a:r>
-              <a:rPr lang="en-US" altLang="ja-JP"/>
-              <a:t>&lt;__BASEFILENAME__&gt;_slide&lt;__SLIDENUM__&gt;_fig.png</a:t>
-            </a:r>
-            <a:r>
-              <a:t>){ width=95% }</a:t>
-            </a:r>
-            <a:endParaRPr lang="en-US"/>
-          </a:p>
-          <a:p>
-            <a:endParaRPr lang="en-US"/>
-          </a:p>
-          <a:p>
-            <a:pPr marL="0" marR="0" lvl="0" indent="0" algn="l" defTabSz="914400" rtl="0" eaLnBrk="1" fontAlgn="auto" latinLnBrk="0" hangingPunct="1">
-              <a:lnSpc>
-                <a:spcPct val="100000"/>
-              </a:lnSpc>
-              <a:spcBef>
-                <a:spcPts val="0"/>
-              </a:spcBef>
-              <a:spcAft>
-                <a:spcPts val="0"/>
-              </a:spcAft>
-              <a:buClrTx/>
-              <a:buSzTx/>
-              <a:buFontTx/>
-              <a:buNone/>
-              <a:tabLst/>
-              <a:defRPr/>
-            </a:pPr>
-            <a:r>
-              <a:rPr lang="en-US" altLang="ja-JP"/>
+          <a:p/>
+          <a:p>
+            <a:r>
+              <a:t>::: {.center}</a:t>
+            </a:r>
+          </a:p>
+          <a:p/>
+          <a:p>
+            <a:r>
+              <a:t>![](figures/&lt;__BASEFILENAME__&gt;_slide&lt;__SLIDENUM__&gt;_fig.png){ width=95% }</a:t>
+            </a:r>
+          </a:p>
+          <a:p/>
+          <a:p>
+            <a:r>
               <a:t>![](figures/&lt;__BASEFILENAME__&gt;_keyvisual.png){ width=60% }</a:t>
             </a:r>
           </a:p>
-          <a:p>
-            <a:endParaRPr/>
-          </a:p>
-          <a:p>
-            <a:endParaRPr/>
-          </a:p>
-          <a:p>
-            <a:r>
-              <a:t>```{=latex}</a:t>
-            </a:r>
-          </a:p>
-          <a:p>
-            <a:r>
-              <a:t>\end{center}</a:t>
-            </a:r>
-          </a:p>
-          <a:p>
-            <a:r>
-              <a:t>```</a:t>
+          <a:p/>
+          <a:p/>
+          <a:p>
+            <a:r>
+              <a:t>:::</a:t>
             </a:r>
           </a:p>
         </p:txBody>
@@ -1213,9 +1108,7 @@
               <a:t>NOTE_CONTENT_FORMAT: 1.0</a:t>
             </a:r>
           </a:p>
-          <a:p>
-            <a:endParaRPr/>
-          </a:p>
+          <a:p/>
           <a:p>
             <a:r>
               <a:t>===BLOCK===</a:t>
@@ -1226,9 +1119,7 @@
               <a:t>{{BLOCK:IMAGE}}</a:t>
             </a:r>
           </a:p>
-          <a:p>
-            <a:endParaRPr/>
-          </a:p>
+          <a:p/>
           <a:p>
             <a:r>
               <a:t>export-image-mode: slide_with_rectpct</a:t>
@@ -1241,13 +1132,10 @@
           </a:p>
           <a:p>
             <a:r>
-              <a:rPr lang="en-US" altLang="ja-JP"/>
               <a:t>export-image: extracted/figures/&lt;__BASEFILENAME__&gt;_slide&lt;__SLIDENUM__&gt;_fig.png</a:t>
             </a:r>
           </a:p>
-          <a:p>
-            <a:endParaRPr/>
-          </a:p>
+          <a:p/>
           <a:p>
             <a:r>
               <a:t>===BLOCK===</a:t>
@@ -1258,12 +1146,9 @@
               <a:t>{{BLOCK:MD:LONG}}</a:t>
             </a:r>
           </a:p>
-          <a:p>
-            <a:endParaRPr/>
-          </a:p>
-          <a:p>
-            <a:r>
-              <a:rPr lang="en-US" altLang="ja-JP"/>
+          <a:p/>
+          <a:p>
+            <a:r>
               <a:t>export-note: extracted/&lt;__BASEFILENAME__&gt;_slide&lt;__SLIDENUM__&gt;_md.md</a:t>
             </a:r>
           </a:p>
@@ -1277,65 +1162,34 @@
               <a:t>## &lt;__TITLE__&gt;</a:t>
             </a:r>
           </a:p>
-          <a:p>
-            <a:endParaRPr/>
-          </a:p>
+          <a:p/>
           <a:p>
             <a:r>
               <a:t>実行後は2つのpptxファイルがマージ（結合）されています。</a:t>
             </a:r>
           </a:p>
-          <a:p>
-            <a:endParaRPr/>
-          </a:p>
+          <a:p/>
           <a:p>
             <a:r>
               <a:t>結合だけなので、章・節番号はつきません。</a:t>
             </a:r>
           </a:p>
-          <a:p>
-            <a:endParaRPr/>
-          </a:p>
-          <a:p>
-            <a:r>
-              <a:t>```{=latex}</a:t>
-            </a:r>
-          </a:p>
-          <a:p>
-            <a:r>
-              <a:t>\begin{center}</a:t>
-            </a:r>
-          </a:p>
-          <a:p>
-            <a:r>
-              <a:t>```</a:t>
-            </a:r>
-          </a:p>
-          <a:p>
-            <a:endParaRPr/>
-          </a:p>
-          <a:p>
-            <a:r>
-              <a:rPr lang="en-US" altLang="ja-JP"/>
+          <a:p/>
+          <a:p>
+            <a:r>
+              <a:t>::: {.center}</a:t>
+            </a:r>
+          </a:p>
+          <a:p/>
+          <a:p>
+            <a:r>
               <a:t>![](figures/&lt;__BASEFILENAME__&gt;_slide&lt;__SLIDENUM__&gt;_fig.png){ width=95% }</a:t>
             </a:r>
           </a:p>
-          <a:p>
-            <a:endParaRPr/>
-          </a:p>
-          <a:p>
-            <a:r>
-              <a:t>```{=latex}</a:t>
-            </a:r>
-          </a:p>
-          <a:p>
-            <a:r>
-              <a:t>\end{center}</a:t>
-            </a:r>
-          </a:p>
-          <a:p>
-            <a:r>
-              <a:t>```</a:t>
+          <a:p/>
+          <a:p>
+            <a:r>
+              <a:t>:::</a:t>
             </a:r>
           </a:p>
         </p:txBody>
@@ -1448,9 +1302,7 @@
               <a:t>NOTE_CONTENT_FORMAT: 1.0</a:t>
             </a:r>
           </a:p>
-          <a:p>
-            <a:endParaRPr/>
-          </a:p>
+          <a:p/>
           <a:p>
             <a:r>
               <a:t>===BLOCK===</a:t>
@@ -1461,9 +1313,7 @@
               <a:t>{{BLOCK:IMAGE}}</a:t>
             </a:r>
           </a:p>
-          <a:p>
-            <a:endParaRPr/>
-          </a:p>
+          <a:p/>
           <a:p>
             <a:r>
               <a:t>export-image-mode: slide_with_rectpct</a:t>
@@ -1476,13 +1326,10 @@
           </a:p>
           <a:p>
             <a:r>
-              <a:rPr lang="en-US" altLang="ja-JP"/>
               <a:t>export-image: extracted/figures/&lt;__BASEFILENAME__&gt;_slide&lt;__SLIDENUM__&gt;_fig.png</a:t>
             </a:r>
           </a:p>
-          <a:p>
-            <a:endParaRPr/>
-          </a:p>
+          <a:p/>
           <a:p>
             <a:r>
               <a:t>===BLOCK===</a:t>
@@ -1493,12 +1340,9 @@
               <a:t>{{BLOCK:MD:LONG}}</a:t>
             </a:r>
           </a:p>
-          <a:p>
-            <a:endParaRPr/>
-          </a:p>
-          <a:p>
-            <a:r>
-              <a:rPr lang="en-US" altLang="ja-JP"/>
+          <a:p/>
+          <a:p>
+            <a:r>
               <a:t>export-note: extracted/&lt;__BASEFILENAME__&gt;_slide&lt;__SLIDENUM__&gt;_md.md</a:t>
             </a:r>
           </a:p>
@@ -1512,9 +1356,7 @@
               <a:t>## &lt;__TITLE__&gt;</a:t>
             </a:r>
           </a:p>
-          <a:p>
-            <a:endParaRPr/>
-          </a:p>
+          <a:p/>
           <a:p>
             <a:r>
               <a:t>結合指示書では、output.pptxfilename: に結合後のpptxファイル名を記載し、</a:t>
@@ -1525,54 +1367,25 @@
               <a:t>procedureセクションに　operation: insertpptx の配列で結合対象ファイルを記載します。</a:t>
             </a:r>
           </a:p>
-          <a:p>
-            <a:endParaRPr/>
-          </a:p>
-          <a:p>
-            <a:r>
-              <a:t>```{=latex}</a:t>
-            </a:r>
-          </a:p>
-          <a:p>
-            <a:r>
-              <a:t>\begin{center}</a:t>
-            </a:r>
-          </a:p>
-          <a:p>
-            <a:r>
-              <a:t>```</a:t>
-            </a:r>
-          </a:p>
-          <a:p>
-            <a:endParaRPr/>
-          </a:p>
-          <a:p>
-            <a:r>
-              <a:rPr lang="en-US" altLang="ja-JP"/>
+          <a:p/>
+          <a:p>
+            <a:r>
+              <a:t>::: {.center}</a:t>
+            </a:r>
+          </a:p>
+          <a:p/>
+          <a:p>
+            <a:r>
               <a:t>![](figures/&lt;__BASEFILENAME__&gt;_slide&lt;__SLIDENUM__&gt;_fig.png){ width=95% }</a:t>
             </a:r>
           </a:p>
-          <a:p>
-            <a:endParaRPr/>
-          </a:p>
-          <a:p>
-            <a:r>
-              <a:t>```{=latex}</a:t>
-            </a:r>
-          </a:p>
-          <a:p>
-            <a:r>
-              <a:t>\end{center}</a:t>
-            </a:r>
-          </a:p>
-          <a:p>
-            <a:r>
-              <a:t>```</a:t>
-            </a:r>
-          </a:p>
-          <a:p>
-            <a:endParaRPr/>
-          </a:p>
+          <a:p/>
+          <a:p>
+            <a:r>
+              <a:t>:::</a:t>
+            </a:r>
+          </a:p>
+          <a:p/>
           <a:p>
             <a:r>
               <a:t>PowerPointのデザインスタイル等は最初のファイル first.pptx が基準になるので、残りのファイルのスタイルが違っているとレイアウト崩れ等が起きることがあるのでご注意ください。</a:t>
